--- a/session3/exam-strategy/q4/q4_exam_strategy.pptx
+++ b/session3/exam-strategy/q4/q4_exam_strategy.pptx
@@ -3187,8 +3187,8 @@
         </p:nvSpPr>
         <p:spPr>
           <a:xfrm>
-            <a:off x="274320" y="685800"/>
-            <a:ext cx="6400800" cy="1645920"/>
+            <a:off x="274320" y="640080"/>
+            <a:ext cx="6583680" cy="1280160"/>
           </a:xfrm>
           <a:prstGeom prst="rect">
             <a:avLst/>
@@ -3196,13 +3196,13 @@
           <a:noFill/>
         </p:spPr>
         <p:txBody>
-          <a:bodyPr wrap="square">
+          <a:bodyPr wrap="square" tIns="0" bIns="0">
             <a:spAutoFit/>
           </a:bodyPr>
           <a:lstStyle/>
           <a:p>
             <a:pPr>
-              <a:defRPr sz="1100">
+              <a:defRPr sz="900">
                 <a:solidFill>
                   <a:srgbClr val="FFFFFF"/>
                 </a:solidFill>
@@ -3210,7 +3210,7 @@
               </a:defRPr>
             </a:pPr>
             <a:r>
-              <a:t>A company developed a warehouse fulfillment application by using AWS Step Functions. The Step Functions activity workers run on tablets that warehouse employees use. Some long-running activities fail because of problems with individual tablets. These problems include loss of battery power. The application must re-assign interrupted activities to another worker as soon as possible. If an activity fails three times, the state machine should fail. Which Step Functions configuration will meet the...</a:t>
+              <a:t>A company developed a warehouse fulfillment application by using AWS Step Functions. The Step Functions activity workers run on tablets that warehouse employees use. Some long-running activities fail because of problems with individual tablets. These problems include loss of battery power. The application must re-assign interrupted activities to...</a:t>
             </a:r>
           </a:p>
         </p:txBody>
@@ -3223,8 +3223,8 @@
         </p:nvSpPr>
         <p:spPr>
           <a:xfrm>
-            <a:off x="365760" y="2377440"/>
-            <a:ext cx="274320" cy="274320"/>
+            <a:off x="274320" y="2057400"/>
+            <a:ext cx="201168" cy="201168"/>
           </a:xfrm>
           <a:prstGeom prst="ellipse">
             <a:avLst/>
@@ -3255,7 +3255,7 @@
           <a:lstStyle/>
           <a:p>
             <a:pPr algn="ctr">
-              <a:defRPr sz="900" b="1">
+              <a:defRPr sz="700" b="1">
                 <a:solidFill>
                   <a:srgbClr val="FFFFFF"/>
                 </a:solidFill>
@@ -3275,8 +3275,8 @@
         </p:nvSpPr>
         <p:spPr>
           <a:xfrm>
-            <a:off x="777240" y="2377440"/>
-            <a:ext cx="5943600" cy="411480"/>
+            <a:off x="548640" y="2011680"/>
+            <a:ext cx="6400800" cy="736092"/>
           </a:xfrm>
           <a:prstGeom prst="rect">
             <a:avLst/>
@@ -3284,13 +3284,13 @@
           <a:noFill/>
         </p:spPr>
         <p:txBody>
-          <a:bodyPr wrap="square">
+          <a:bodyPr wrap="square" tIns="25400" bIns="0" lIns="0">
             <a:spAutoFit/>
           </a:bodyPr>
           <a:lstStyle/>
           <a:p>
             <a:pPr>
-              <a:defRPr sz="1000">
+              <a:defRPr sz="800">
                 <a:solidFill>
                   <a:srgbClr val="CCCCCC"/>
                 </a:solidFill>
@@ -3298,7 +3298,7 @@
               </a:defRPr>
             </a:pPr>
             <a:r>
-              <a:t>You set the Retry field at the individual state level, not at the overall state machine level. States.Timeout is an erro</a:t>
+              <a:t>You set the Retry field at the individual state level, not at the overall state machine level. State</a:t>
             </a:r>
           </a:p>
         </p:txBody>
@@ -3311,8 +3311,8 @@
         </p:nvSpPr>
         <p:spPr>
           <a:xfrm>
-            <a:off x="365760" y="2834640"/>
-            <a:ext cx="274320" cy="274320"/>
+            <a:off x="274320" y="2811780"/>
+            <a:ext cx="201168" cy="201168"/>
           </a:xfrm>
           <a:prstGeom prst="ellipse">
             <a:avLst/>
@@ -3343,7 +3343,7 @@
           <a:lstStyle/>
           <a:p>
             <a:pPr algn="ctr">
-              <a:defRPr sz="900" b="1">
+              <a:defRPr sz="700" b="1">
                 <a:solidFill>
                   <a:srgbClr val="FFFFFF"/>
                 </a:solidFill>
@@ -3363,8 +3363,8 @@
         </p:nvSpPr>
         <p:spPr>
           <a:xfrm>
-            <a:off x="777240" y="2834640"/>
-            <a:ext cx="5943600" cy="411480"/>
+            <a:off x="548640" y="2766060"/>
+            <a:ext cx="6400800" cy="736092"/>
           </a:xfrm>
           <a:prstGeom prst="rect">
             <a:avLst/>
@@ -3372,13 +3372,13 @@
           <a:noFill/>
         </p:spPr>
         <p:txBody>
-          <a:bodyPr wrap="square">
+          <a:bodyPr wrap="square" tIns="25400" bIns="0" lIns="0">
             <a:spAutoFit/>
           </a:bodyPr>
           <a:lstStyle/>
           <a:p>
             <a:pPr>
-              <a:defRPr sz="1000">
+              <a:defRPr sz="800">
                 <a:solidFill>
                   <a:srgbClr val="CCCCCC"/>
                 </a:solidFill>
@@ -3399,8 +3399,8 @@
         </p:nvSpPr>
         <p:spPr>
           <a:xfrm>
-            <a:off x="365760" y="3291840"/>
-            <a:ext cx="274320" cy="274320"/>
+            <a:off x="274320" y="3566160"/>
+            <a:ext cx="201168" cy="201168"/>
           </a:xfrm>
           <a:prstGeom prst="ellipse">
             <a:avLst/>
@@ -3431,7 +3431,7 @@
           <a:lstStyle/>
           <a:p>
             <a:pPr algn="ctr">
-              <a:defRPr sz="900" b="1">
+              <a:defRPr sz="700" b="1">
                 <a:solidFill>
                   <a:srgbClr val="FFFFFF"/>
                 </a:solidFill>
@@ -3451,8 +3451,8 @@
         </p:nvSpPr>
         <p:spPr>
           <a:xfrm>
-            <a:off x="777240" y="3291840"/>
-            <a:ext cx="5943600" cy="411480"/>
+            <a:off x="548640" y="3520440"/>
+            <a:ext cx="6400800" cy="736092"/>
           </a:xfrm>
           <a:prstGeom prst="rect">
             <a:avLst/>
@@ -3460,13 +3460,13 @@
           <a:noFill/>
         </p:spPr>
         <p:txBody>
-          <a:bodyPr wrap="square">
+          <a:bodyPr wrap="square" tIns="25400" bIns="0" lIns="0">
             <a:spAutoFit/>
           </a:bodyPr>
           <a:lstStyle/>
           <a:p>
             <a:pPr>
-              <a:defRPr sz="1000">
+              <a:defRPr sz="800">
                 <a:solidFill>
                   <a:srgbClr val="CCCCCC"/>
                 </a:solidFill>
@@ -3474,7 +3474,7 @@
               </a:defRPr>
             </a:pPr>
             <a:r>
-              <a:t>The TimeoutSeconds attribute defines the maximum task duration before the task is considered failed. A value of 30 would</a:t>
+              <a:t>The TimeoutSeconds attribute defines the maximum task duration before the task is considered failed.</a:t>
             </a:r>
           </a:p>
         </p:txBody>
@@ -3487,8 +3487,8 @@
         </p:nvSpPr>
         <p:spPr>
           <a:xfrm>
-            <a:off x="365760" y="3749039"/>
-            <a:ext cx="274320" cy="274320"/>
+            <a:off x="274320" y="4320540"/>
+            <a:ext cx="201168" cy="201168"/>
           </a:xfrm>
           <a:prstGeom prst="ellipse">
             <a:avLst/>
@@ -3519,7 +3519,7 @@
           <a:lstStyle/>
           <a:p>
             <a:pPr algn="ctr">
-              <a:defRPr sz="900" b="1">
+              <a:defRPr sz="700" b="1">
                 <a:solidFill>
                   <a:srgbClr val="FFFFFF"/>
                 </a:solidFill>
@@ -3539,8 +3539,8 @@
         </p:nvSpPr>
         <p:spPr>
           <a:xfrm>
-            <a:off x="777240" y="3749039"/>
-            <a:ext cx="5943600" cy="411480"/>
+            <a:off x="548640" y="4274820"/>
+            <a:ext cx="6400800" cy="736092"/>
           </a:xfrm>
           <a:prstGeom prst="rect">
             <a:avLst/>
@@ -3548,13 +3548,13 @@
           <a:noFill/>
         </p:spPr>
         <p:txBody>
-          <a:bodyPr wrap="square">
+          <a:bodyPr wrap="square" tIns="25400" bIns="0" lIns="0">
             <a:spAutoFit/>
           </a:bodyPr>
           <a:lstStyle/>
           <a:p>
             <a:pPr>
-              <a:defRPr sz="1000">
+              <a:defRPr sz="800">
                 <a:solidFill>
                   <a:srgbClr val="CCCCCC"/>
                 </a:solidFill>
@@ -3562,7 +3562,7 @@
               </a:defRPr>
             </a:pPr>
             <a:r>
-              <a:t>The HeartbeatSeconds attribute defines the maximum interval that the task will wait for a heartbeat signal. If an activi</a:t>
+              <a:t>The HeartbeatSeconds attribute defines the maximum interval that the task will wait for a heartbeat </a:t>
             </a:r>
           </a:p>
         </p:txBody>
@@ -3844,8 +3844,8 @@
         </p:blipFill>
         <p:spPr>
           <a:xfrm>
-            <a:off x="182880" y="914400"/>
-            <a:ext cx="5280660" cy="3840480"/>
+            <a:off x="182880" y="1202952"/>
+            <a:ext cx="5303520" cy="3263375"/>
           </a:xfrm>
           <a:prstGeom prst="rect">
             <a:avLst/>
@@ -3980,9 +3980,9 @@
           <a:p>
             <a:pPr>
               <a:spcAft>
-                <a:spcPts val="600"/>
+                <a:spcPts val="400"/>
               </a:spcAft>
-              <a:defRPr sz="900">
+              <a:defRPr sz="800">
                 <a:solidFill>
                   <a:srgbClr val="212121"/>
                 </a:solidFill>
@@ -3990,15 +3990,15 @@
               </a:defRPr>
             </a:pPr>
             <a:r>
-              <a:t>• You set the Retry field at the individual state level, not at the overall state machine level.</a:t>
+              <a:t>• You set the Retry field at the individual state level</a:t>
             </a:r>
           </a:p>
           <a:p>
             <a:pPr>
               <a:spcAft>
-                <a:spcPts val="600"/>
+                <a:spcPts val="400"/>
               </a:spcAft>
-              <a:defRPr sz="900">
+              <a:defRPr sz="800">
                 <a:solidFill>
                   <a:srgbClr val="212121"/>
                 </a:solidFill>
@@ -4006,7 +4006,23 @@
               </a:defRPr>
             </a:pPr>
             <a:r>
-              <a:t>• States.Timeout is an error name and not a field that you can set.</a:t>
+              <a:t>• Not at the overall state machine level</a:t>
+            </a:r>
+          </a:p>
+          <a:p>
+            <a:pPr>
+              <a:spcAft>
+                <a:spcPts val="400"/>
+              </a:spcAft>
+              <a:defRPr sz="800">
+                <a:solidFill>
+                  <a:srgbClr val="212121"/>
+                </a:solidFill>
+                <a:latin typeface="Segoe UI"/>
+              </a:defRPr>
+            </a:pPr>
+            <a:r>
+              <a:t>• States.Timeout is an error name and not a field that you can set</a:t>
             </a:r>
           </a:p>
         </p:txBody>
@@ -4185,8 +4201,8 @@
         </p:blipFill>
         <p:spPr>
           <a:xfrm>
-            <a:off x="182880" y="914400"/>
-            <a:ext cx="5280660" cy="3840480"/>
+            <a:off x="182880" y="1198994"/>
+            <a:ext cx="5303520" cy="3271290"/>
           </a:xfrm>
           <a:prstGeom prst="rect">
             <a:avLst/>
@@ -4321,9 +4337,9 @@
           <a:p>
             <a:pPr>
               <a:spcAft>
-                <a:spcPts val="600"/>
+                <a:spcPts val="400"/>
               </a:spcAft>
-              <a:defRPr sz="900">
+              <a:defRPr sz="800">
                 <a:solidFill>
                   <a:srgbClr val="212121"/>
                 </a:solidFill>
@@ -4331,15 +4347,15 @@
               </a:defRPr>
             </a:pPr>
             <a:r>
-              <a:t>• States.TaskFailed is an error name.</a:t>
+              <a:t>• States.TaskFailed is an error name</a:t>
             </a:r>
           </a:p>
           <a:p>
             <a:pPr>
               <a:spcAft>
-                <a:spcPts val="600"/>
+                <a:spcPts val="400"/>
               </a:spcAft>
-              <a:defRPr sz="900">
+              <a:defRPr sz="800">
                 <a:solidFill>
                   <a:srgbClr val="212121"/>
                 </a:solidFill>
@@ -4347,7 +4363,7 @@
               </a:defRPr>
             </a:pPr>
             <a:r>
-              <a:t>• This error name is not a field that you can set.</a:t>
+              <a:t>• This error name is not a field that you can set</a:t>
             </a:r>
           </a:p>
         </p:txBody>
@@ -4526,8 +4542,8 @@
         </p:blipFill>
         <p:spPr>
           <a:xfrm>
-            <a:off x="182880" y="914400"/>
-            <a:ext cx="5280660" cy="3840480"/>
+            <a:off x="182880" y="1166632"/>
+            <a:ext cx="5303520" cy="3336014"/>
           </a:xfrm>
           <a:prstGeom prst="rect">
             <a:avLst/>
@@ -4662,9 +4678,9 @@
           <a:p>
             <a:pPr>
               <a:spcAft>
-                <a:spcPts val="600"/>
+                <a:spcPts val="400"/>
               </a:spcAft>
-              <a:defRPr sz="900">
+              <a:defRPr sz="800">
                 <a:solidFill>
                   <a:srgbClr val="212121"/>
                 </a:solidFill>
@@ -4672,15 +4688,15 @@
               </a:defRPr>
             </a:pPr>
             <a:r>
-              <a:t>• The TimeoutSeconds attribute defines the maximum task duration before the task is considered failed.</a:t>
+              <a:t>• The TimeoutSeconds attribute defines the maximum task duration before the task is considered failed</a:t>
             </a:r>
           </a:p>
           <a:p>
             <a:pPr>
               <a:spcAft>
-                <a:spcPts val="600"/>
+                <a:spcPts val="400"/>
               </a:spcAft>
-              <a:defRPr sz="900">
+              <a:defRPr sz="800">
                 <a:solidFill>
                   <a:srgbClr val="212121"/>
                 </a:solidFill>
@@ -4688,7 +4704,23 @@
               </a:defRPr>
             </a:pPr>
             <a:r>
-              <a:t>• A value of 30 would cause any task that runs longer than 30 seconds to fail, even if there were no problems with the tablet.</a:t>
+              <a:t>• A value of 30 would cause any task that runs longer than 30 seconds to fail</a:t>
+            </a:r>
+          </a:p>
+          <a:p>
+            <a:pPr>
+              <a:spcAft>
+                <a:spcPts val="400"/>
+              </a:spcAft>
+              <a:defRPr sz="800">
+                <a:solidFill>
+                  <a:srgbClr val="212121"/>
+                </a:solidFill>
+                <a:latin typeface="Segoe UI"/>
+              </a:defRPr>
+            </a:pPr>
+            <a:r>
+              <a:t>• Even if there were no problems with the tablet</a:t>
             </a:r>
           </a:p>
         </p:txBody>
@@ -4867,8 +4899,8 @@
         </p:blipFill>
         <p:spPr>
           <a:xfrm>
-            <a:off x="182880" y="914400"/>
-            <a:ext cx="5280660" cy="3840480"/>
+            <a:off x="182880" y="1974396"/>
+            <a:ext cx="5303520" cy="1720487"/>
           </a:xfrm>
           <a:prstGeom prst="rect">
             <a:avLst/>
@@ -5003,9 +5035,9 @@
           <a:p>
             <a:pPr>
               <a:spcAft>
-                <a:spcPts val="600"/>
+                <a:spcPts val="400"/>
               </a:spcAft>
-              <a:defRPr sz="900">
+              <a:defRPr sz="800">
                 <a:solidFill>
                   <a:srgbClr val="212121"/>
                 </a:solidFill>
@@ -5013,15 +5045,15 @@
               </a:defRPr>
             </a:pPr>
             <a:r>
-              <a:t>• The HeartbeatSeconds attribute defines the maximum interval that the task will wait for a heartbeat signal.</a:t>
+              <a:t>• The HeartbeatSeconds attribute defines the maximum interval that the task will wait for a heartbeat signal</a:t>
             </a:r>
           </a:p>
           <a:p>
             <a:pPr>
               <a:spcAft>
-                <a:spcPts val="600"/>
+                <a:spcPts val="400"/>
               </a:spcAft>
-              <a:defRPr sz="900">
+              <a:defRPr sz="800">
                 <a:solidFill>
                   <a:srgbClr val="212121"/>
                 </a:solidFill>
@@ -5029,15 +5061,15 @@
               </a:defRPr>
             </a:pPr>
             <a:r>
-              <a:t>• If an activity worker fails to send heartbeats within this interval, the state is failed.</a:t>
+              <a:t>• If an activity worker fails to send heartbeats within this interval, the state is failed</a:t>
             </a:r>
           </a:p>
           <a:p>
             <a:pPr>
               <a:spcAft>
-                <a:spcPts val="600"/>
+                <a:spcPts val="400"/>
               </a:spcAft>
-              <a:defRPr sz="900">
+              <a:defRPr sz="800">
                 <a:solidFill>
                   <a:srgbClr val="212121"/>
                 </a:solidFill>
@@ -5045,7 +5077,7 @@
               </a:defRPr>
             </a:pPr>
             <a:r>
-              <a:t>• A retry policy on the state allows another activity worker to attempt to complete the state.</a:t>
+              <a:t>• A retry policy on the state allows another activity worker to attempt to complete the state</a:t>
             </a:r>
           </a:p>
         </p:txBody>

--- a/session3/exam-strategy/q4/q4_exam_strategy.pptx
+++ b/session3/exam-strategy/q4/q4_exam_strategy.pptx
@@ -3187,8 +3187,8 @@
         </p:nvSpPr>
         <p:spPr>
           <a:xfrm>
-            <a:off x="274320" y="640080"/>
-            <a:ext cx="6583680" cy="1280160"/>
+            <a:off x="274320" y="685800"/>
+            <a:ext cx="6400800" cy="1645920"/>
           </a:xfrm>
           <a:prstGeom prst="rect">
             <a:avLst/>
@@ -3196,13 +3196,13 @@
           <a:noFill/>
         </p:spPr>
         <p:txBody>
-          <a:bodyPr wrap="square" tIns="0" bIns="0">
+          <a:bodyPr wrap="square">
             <a:spAutoFit/>
           </a:bodyPr>
           <a:lstStyle/>
           <a:p>
             <a:pPr>
-              <a:defRPr sz="900">
+              <a:defRPr sz="1100">
                 <a:solidFill>
                   <a:srgbClr val="FFFFFF"/>
                 </a:solidFill>
@@ -3210,7 +3210,7 @@
               </a:defRPr>
             </a:pPr>
             <a:r>
-              <a:t>A company developed a warehouse fulfillment application by using AWS Step Functions. The Step Functions activity workers run on tablets that warehouse employees use. Some long-running activities fail because of problems with individual tablets. These problems include loss of battery power. The application must re-assign interrupted activities to...</a:t>
+              <a:t>A company developed a warehouse fulfillment application by using AWS Step Functions. The Step Functions activity workers run on tablets that warehouse employees use. Some long-running activities fail because of problems with individual tablets. These problems include loss of battery power. The application must re-assign interrupted activities to another worker as soon as possible. If an activity fails three times, the state machine should fail. Which Step Functions configuration will meet the...</a:t>
             </a:r>
           </a:p>
         </p:txBody>
@@ -3223,8 +3223,8 @@
         </p:nvSpPr>
         <p:spPr>
           <a:xfrm>
-            <a:off x="274320" y="2057400"/>
-            <a:ext cx="201168" cy="201168"/>
+            <a:off x="365760" y="2377440"/>
+            <a:ext cx="274320" cy="274320"/>
           </a:xfrm>
           <a:prstGeom prst="ellipse">
             <a:avLst/>
@@ -3255,7 +3255,7 @@
           <a:lstStyle/>
           <a:p>
             <a:pPr algn="ctr">
-              <a:defRPr sz="700" b="1">
+              <a:defRPr sz="900" b="1">
                 <a:solidFill>
                   <a:srgbClr val="FFFFFF"/>
                 </a:solidFill>
@@ -3275,8 +3275,8 @@
         </p:nvSpPr>
         <p:spPr>
           <a:xfrm>
-            <a:off x="548640" y="2011680"/>
-            <a:ext cx="6400800" cy="736092"/>
+            <a:off x="777240" y="2377440"/>
+            <a:ext cx="5943600" cy="411480"/>
           </a:xfrm>
           <a:prstGeom prst="rect">
             <a:avLst/>
@@ -3284,13 +3284,13 @@
           <a:noFill/>
         </p:spPr>
         <p:txBody>
-          <a:bodyPr wrap="square" tIns="25400" bIns="0" lIns="0">
+          <a:bodyPr wrap="square">
             <a:spAutoFit/>
           </a:bodyPr>
           <a:lstStyle/>
           <a:p>
             <a:pPr>
-              <a:defRPr sz="800">
+              <a:defRPr sz="1000">
                 <a:solidFill>
                   <a:srgbClr val="CCCCCC"/>
                 </a:solidFill>
@@ -3298,7 +3298,7 @@
               </a:defRPr>
             </a:pPr>
             <a:r>
-              <a:t>You set the Retry field at the individual state level, not at the overall state machine level. State</a:t>
+              <a:t>You set the Retry field at the individual state level, not at the overall state machine level. States.Timeout is an erro</a:t>
             </a:r>
           </a:p>
         </p:txBody>
@@ -3311,8 +3311,8 @@
         </p:nvSpPr>
         <p:spPr>
           <a:xfrm>
-            <a:off x="274320" y="2811780"/>
-            <a:ext cx="201168" cy="201168"/>
+            <a:off x="365760" y="2834640"/>
+            <a:ext cx="274320" cy="274320"/>
           </a:xfrm>
           <a:prstGeom prst="ellipse">
             <a:avLst/>
@@ -3343,7 +3343,7 @@
           <a:lstStyle/>
           <a:p>
             <a:pPr algn="ctr">
-              <a:defRPr sz="700" b="1">
+              <a:defRPr sz="900" b="1">
                 <a:solidFill>
                   <a:srgbClr val="FFFFFF"/>
                 </a:solidFill>
@@ -3363,8 +3363,8 @@
         </p:nvSpPr>
         <p:spPr>
           <a:xfrm>
-            <a:off x="548640" y="2766060"/>
-            <a:ext cx="6400800" cy="736092"/>
+            <a:off x="777240" y="2834640"/>
+            <a:ext cx="5943600" cy="411480"/>
           </a:xfrm>
           <a:prstGeom prst="rect">
             <a:avLst/>
@@ -3372,13 +3372,13 @@
           <a:noFill/>
         </p:spPr>
         <p:txBody>
-          <a:bodyPr wrap="square" tIns="25400" bIns="0" lIns="0">
+          <a:bodyPr wrap="square">
             <a:spAutoFit/>
           </a:bodyPr>
           <a:lstStyle/>
           <a:p>
             <a:pPr>
-              <a:defRPr sz="800">
+              <a:defRPr sz="1000">
                 <a:solidFill>
                   <a:srgbClr val="CCCCCC"/>
                 </a:solidFill>
@@ -3399,8 +3399,8 @@
         </p:nvSpPr>
         <p:spPr>
           <a:xfrm>
-            <a:off x="274320" y="3566160"/>
-            <a:ext cx="201168" cy="201168"/>
+            <a:off x="365760" y="3291840"/>
+            <a:ext cx="274320" cy="274320"/>
           </a:xfrm>
           <a:prstGeom prst="ellipse">
             <a:avLst/>
@@ -3431,7 +3431,7 @@
           <a:lstStyle/>
           <a:p>
             <a:pPr algn="ctr">
-              <a:defRPr sz="700" b="1">
+              <a:defRPr sz="900" b="1">
                 <a:solidFill>
                   <a:srgbClr val="FFFFFF"/>
                 </a:solidFill>
@@ -3451,8 +3451,8 @@
         </p:nvSpPr>
         <p:spPr>
           <a:xfrm>
-            <a:off x="548640" y="3520440"/>
-            <a:ext cx="6400800" cy="736092"/>
+            <a:off x="777240" y="3291840"/>
+            <a:ext cx="5943600" cy="411480"/>
           </a:xfrm>
           <a:prstGeom prst="rect">
             <a:avLst/>
@@ -3460,13 +3460,13 @@
           <a:noFill/>
         </p:spPr>
         <p:txBody>
-          <a:bodyPr wrap="square" tIns="25400" bIns="0" lIns="0">
+          <a:bodyPr wrap="square">
             <a:spAutoFit/>
           </a:bodyPr>
           <a:lstStyle/>
           <a:p>
             <a:pPr>
-              <a:defRPr sz="800">
+              <a:defRPr sz="1000">
                 <a:solidFill>
                   <a:srgbClr val="CCCCCC"/>
                 </a:solidFill>
@@ -3474,7 +3474,7 @@
               </a:defRPr>
             </a:pPr>
             <a:r>
-              <a:t>The TimeoutSeconds attribute defines the maximum task duration before the task is considered failed.</a:t>
+              <a:t>The TimeoutSeconds attribute defines the maximum task duration before the task is considered failed. A value of 30 would</a:t>
             </a:r>
           </a:p>
         </p:txBody>
@@ -3487,8 +3487,8 @@
         </p:nvSpPr>
         <p:spPr>
           <a:xfrm>
-            <a:off x="274320" y="4320540"/>
-            <a:ext cx="201168" cy="201168"/>
+            <a:off x="365760" y="3749039"/>
+            <a:ext cx="274320" cy="274320"/>
           </a:xfrm>
           <a:prstGeom prst="ellipse">
             <a:avLst/>
@@ -3519,7 +3519,7 @@
           <a:lstStyle/>
           <a:p>
             <a:pPr algn="ctr">
-              <a:defRPr sz="700" b="1">
+              <a:defRPr sz="900" b="1">
                 <a:solidFill>
                   <a:srgbClr val="FFFFFF"/>
                 </a:solidFill>
@@ -3539,8 +3539,8 @@
         </p:nvSpPr>
         <p:spPr>
           <a:xfrm>
-            <a:off x="548640" y="4274820"/>
-            <a:ext cx="6400800" cy="736092"/>
+            <a:off x="777240" y="3749039"/>
+            <a:ext cx="5943600" cy="411480"/>
           </a:xfrm>
           <a:prstGeom prst="rect">
             <a:avLst/>
@@ -3548,13 +3548,13 @@
           <a:noFill/>
         </p:spPr>
         <p:txBody>
-          <a:bodyPr wrap="square" tIns="25400" bIns="0" lIns="0">
+          <a:bodyPr wrap="square">
             <a:spAutoFit/>
           </a:bodyPr>
           <a:lstStyle/>
           <a:p>
             <a:pPr>
-              <a:defRPr sz="800">
+              <a:defRPr sz="1000">
                 <a:solidFill>
                   <a:srgbClr val="CCCCCC"/>
                 </a:solidFill>
@@ -3562,7 +3562,7 @@
               </a:defRPr>
             </a:pPr>
             <a:r>
-              <a:t>The HeartbeatSeconds attribute defines the maximum interval that the task will wait for a heartbeat </a:t>
+              <a:t>The HeartbeatSeconds attribute defines the maximum interval that the task will wait for a heartbeat signal. If an activi</a:t>
             </a:r>
           </a:p>
         </p:txBody>
@@ -3844,8 +3844,8 @@
         </p:blipFill>
         <p:spPr>
           <a:xfrm>
-            <a:off x="182880" y="1202952"/>
-            <a:ext cx="5303520" cy="3263375"/>
+            <a:off x="182880" y="914400"/>
+            <a:ext cx="3590933" cy="3840480"/>
           </a:xfrm>
           <a:prstGeom prst="rect">
             <a:avLst/>
@@ -3980,9 +3980,9 @@
           <a:p>
             <a:pPr>
               <a:spcAft>
-                <a:spcPts val="400"/>
+                <a:spcPts val="600"/>
               </a:spcAft>
-              <a:defRPr sz="800">
+              <a:defRPr sz="900">
                 <a:solidFill>
                   <a:srgbClr val="212121"/>
                 </a:solidFill>
@@ -3990,15 +3990,15 @@
               </a:defRPr>
             </a:pPr>
             <a:r>
-              <a:t>• You set the Retry field at the individual state level</a:t>
+              <a:t>• You set the Retry field at the individual state level, not at the overall state machine level.</a:t>
             </a:r>
           </a:p>
           <a:p>
             <a:pPr>
               <a:spcAft>
-                <a:spcPts val="400"/>
+                <a:spcPts val="600"/>
               </a:spcAft>
-              <a:defRPr sz="800">
+              <a:defRPr sz="900">
                 <a:solidFill>
                   <a:srgbClr val="212121"/>
                 </a:solidFill>
@@ -4006,23 +4006,7 @@
               </a:defRPr>
             </a:pPr>
             <a:r>
-              <a:t>• Not at the overall state machine level</a:t>
-            </a:r>
-          </a:p>
-          <a:p>
-            <a:pPr>
-              <a:spcAft>
-                <a:spcPts val="400"/>
-              </a:spcAft>
-              <a:defRPr sz="800">
-                <a:solidFill>
-                  <a:srgbClr val="212121"/>
-                </a:solidFill>
-                <a:latin typeface="Segoe UI"/>
-              </a:defRPr>
-            </a:pPr>
-            <a:r>
-              <a:t>• States.Timeout is an error name and not a field that you can set</a:t>
+              <a:t>• States.Timeout is an error name and not a field that you can set.</a:t>
             </a:r>
           </a:p>
         </p:txBody>
@@ -4201,8 +4185,8 @@
         </p:blipFill>
         <p:spPr>
           <a:xfrm>
-            <a:off x="182880" y="1198994"/>
-            <a:ext cx="5303520" cy="3271290"/>
+            <a:off x="182880" y="1620399"/>
+            <a:ext cx="5303520" cy="2428480"/>
           </a:xfrm>
           <a:prstGeom prst="rect">
             <a:avLst/>
@@ -4337,9 +4321,9 @@
           <a:p>
             <a:pPr>
               <a:spcAft>
-                <a:spcPts val="400"/>
+                <a:spcPts val="600"/>
               </a:spcAft>
-              <a:defRPr sz="800">
+              <a:defRPr sz="900">
                 <a:solidFill>
                   <a:srgbClr val="212121"/>
                 </a:solidFill>
@@ -4347,15 +4331,15 @@
               </a:defRPr>
             </a:pPr>
             <a:r>
-              <a:t>• States.TaskFailed is an error name</a:t>
+              <a:t>• States.TaskFailed is an error name.</a:t>
             </a:r>
           </a:p>
           <a:p>
             <a:pPr>
               <a:spcAft>
-                <a:spcPts val="400"/>
+                <a:spcPts val="600"/>
               </a:spcAft>
-              <a:defRPr sz="800">
+              <a:defRPr sz="900">
                 <a:solidFill>
                   <a:srgbClr val="212121"/>
                 </a:solidFill>
@@ -4363,7 +4347,7 @@
               </a:defRPr>
             </a:pPr>
             <a:r>
-              <a:t>• This error name is not a field that you can set</a:t>
+              <a:t>• This error name is not a field that you can set.</a:t>
             </a:r>
           </a:p>
         </p:txBody>
@@ -4542,8 +4526,8 @@
         </p:blipFill>
         <p:spPr>
           <a:xfrm>
-            <a:off x="182880" y="1166632"/>
-            <a:ext cx="5303520" cy="3336014"/>
+            <a:off x="182880" y="1704671"/>
+            <a:ext cx="5303520" cy="2259936"/>
           </a:xfrm>
           <a:prstGeom prst="rect">
             <a:avLst/>
@@ -4678,9 +4662,9 @@
           <a:p>
             <a:pPr>
               <a:spcAft>
-                <a:spcPts val="400"/>
+                <a:spcPts val="600"/>
               </a:spcAft>
-              <a:defRPr sz="800">
+              <a:defRPr sz="900">
                 <a:solidFill>
                   <a:srgbClr val="212121"/>
                 </a:solidFill>
@@ -4688,15 +4672,15 @@
               </a:defRPr>
             </a:pPr>
             <a:r>
-              <a:t>• The TimeoutSeconds attribute defines the maximum task duration before the task is considered failed</a:t>
+              <a:t>• The TimeoutSeconds attribute defines the maximum task duration before the task is considered failed.</a:t>
             </a:r>
           </a:p>
           <a:p>
             <a:pPr>
               <a:spcAft>
-                <a:spcPts val="400"/>
+                <a:spcPts val="600"/>
               </a:spcAft>
-              <a:defRPr sz="800">
+              <a:defRPr sz="900">
                 <a:solidFill>
                   <a:srgbClr val="212121"/>
                 </a:solidFill>
@@ -4704,23 +4688,7 @@
               </a:defRPr>
             </a:pPr>
             <a:r>
-              <a:t>• A value of 30 would cause any task that runs longer than 30 seconds to fail</a:t>
-            </a:r>
-          </a:p>
-          <a:p>
-            <a:pPr>
-              <a:spcAft>
-                <a:spcPts val="400"/>
-              </a:spcAft>
-              <a:defRPr sz="800">
-                <a:solidFill>
-                  <a:srgbClr val="212121"/>
-                </a:solidFill>
-                <a:latin typeface="Segoe UI"/>
-              </a:defRPr>
-            </a:pPr>
-            <a:r>
-              <a:t>• Even if there were no problems with the tablet</a:t>
+              <a:t>• A value of 30 would cause any task that runs longer than 30 seconds to fail, even if there were no problems with the tablet.</a:t>
             </a:r>
           </a:p>
         </p:txBody>
@@ -4899,8 +4867,8 @@
         </p:blipFill>
         <p:spPr>
           <a:xfrm>
-            <a:off x="182880" y="1974396"/>
-            <a:ext cx="5303520" cy="1720487"/>
+            <a:off x="182880" y="914400"/>
+            <a:ext cx="3811051" cy="3840480"/>
           </a:xfrm>
           <a:prstGeom prst="rect">
             <a:avLst/>
@@ -5035,9 +5003,9 @@
           <a:p>
             <a:pPr>
               <a:spcAft>
-                <a:spcPts val="400"/>
+                <a:spcPts val="600"/>
               </a:spcAft>
-              <a:defRPr sz="800">
+              <a:defRPr sz="900">
                 <a:solidFill>
                   <a:srgbClr val="212121"/>
                 </a:solidFill>
@@ -5045,15 +5013,15 @@
               </a:defRPr>
             </a:pPr>
             <a:r>
-              <a:t>• The HeartbeatSeconds attribute defines the maximum interval that the task will wait for a heartbeat signal</a:t>
+              <a:t>• The HeartbeatSeconds attribute defines the maximum interval that the task will wait for a heartbeat signal.</a:t>
             </a:r>
           </a:p>
           <a:p>
             <a:pPr>
               <a:spcAft>
-                <a:spcPts val="400"/>
+                <a:spcPts val="600"/>
               </a:spcAft>
-              <a:defRPr sz="800">
+              <a:defRPr sz="900">
                 <a:solidFill>
                   <a:srgbClr val="212121"/>
                 </a:solidFill>
@@ -5061,15 +5029,15 @@
               </a:defRPr>
             </a:pPr>
             <a:r>
-              <a:t>• If an activity worker fails to send heartbeats within this interval, the state is failed</a:t>
+              <a:t>• If an activity worker fails to send heartbeats within this interval, the state is failed.</a:t>
             </a:r>
           </a:p>
           <a:p>
             <a:pPr>
               <a:spcAft>
-                <a:spcPts val="400"/>
+                <a:spcPts val="600"/>
               </a:spcAft>
-              <a:defRPr sz="800">
+              <a:defRPr sz="900">
                 <a:solidFill>
                   <a:srgbClr val="212121"/>
                 </a:solidFill>
@@ -5077,7 +5045,7 @@
               </a:defRPr>
             </a:pPr>
             <a:r>
-              <a:t>• A retry policy on the state allows another activity worker to attempt to complete the state</a:t>
+              <a:t>• A retry policy on the state allows another activity worker to attempt to complete the state.</a:t>
             </a:r>
           </a:p>
         </p:txBody>
